--- a/data/templates/case_study_v2.pptx
+++ b/data/templates/case_study_v2.pptx
@@ -3832,7 +3832,7 @@
                 <a:solidFill>
                   <a:srgbClr val="111110"/>
                 </a:solidFill>
-                <a:latin typeface="Helvetica"/>
+                <a:latin typeface="Raleway"/>
               </a:rPr>
               <a:t>The Challenge</a:t>
             </a:r>
@@ -3867,7 +3867,7 @@
                 <a:solidFill>
                   <a:srgbClr val="3E3E3E"/>
                 </a:solidFill>
-                <a:latin typeface="Helvetica"/>
+                <a:latin typeface="Raleway"/>
               </a:rPr>
               <a:t>{{CHALLENGE}}</a:t>
             </a:r>
@@ -3990,7 +3990,7 @@
                 <a:solidFill>
                   <a:srgbClr val="111110"/>
                 </a:solidFill>
-                <a:latin typeface="Helvetica"/>
+                <a:latin typeface="Raleway"/>
               </a:rPr>
               <a:t>The Solution</a:t>
             </a:r>
@@ -4025,7 +4025,7 @@
                 <a:solidFill>
                   <a:srgbClr val="3E3E3E"/>
                 </a:solidFill>
-                <a:latin typeface="Helvetica"/>
+                <a:latin typeface="Raleway"/>
               </a:rPr>
               <a:t>{{SOLUTION}}</a:t>
             </a:r>
@@ -4060,7 +4060,7 @@
                 <a:solidFill>
                   <a:srgbClr val="3A8B82"/>
                 </a:solidFill>
-                <a:latin typeface="Helvetica"/>
+                <a:latin typeface="Raleway"/>
               </a:rPr>
               <a:t>Key Capabilities Developed</a:t>
             </a:r>
@@ -4140,7 +4140,7 @@
                 <a:solidFill>
                   <a:srgbClr val="111110"/>
                 </a:solidFill>
-                <a:latin typeface="Helvetica"/>
+                <a:latin typeface="Raleway"/>
               </a:rPr>
               <a:t>{{CAP_1_TITLE}}</a:t>
             </a:r>
@@ -4175,7 +4175,7 @@
                 <a:solidFill>
                   <a:srgbClr val="3E3E3E"/>
                 </a:solidFill>
-                <a:latin typeface="Helvetica"/>
+                <a:latin typeface="Raleway"/>
               </a:rPr>
               <a:t>{{CAP_1_BODY}}</a:t>
             </a:r>
@@ -4255,7 +4255,7 @@
                 <a:solidFill>
                   <a:srgbClr val="111110"/>
                 </a:solidFill>
-                <a:latin typeface="Helvetica"/>
+                <a:latin typeface="Raleway"/>
               </a:rPr>
               <a:t>{{CAP_2_TITLE}}</a:t>
             </a:r>
@@ -4290,7 +4290,7 @@
                 <a:solidFill>
                   <a:srgbClr val="3E3E3E"/>
                 </a:solidFill>
-                <a:latin typeface="Helvetica"/>
+                <a:latin typeface="Raleway"/>
               </a:rPr>
               <a:t>{{CAP_2_BODY}}</a:t>
             </a:r>
@@ -4370,7 +4370,7 @@
                 <a:solidFill>
                   <a:srgbClr val="111110"/>
                 </a:solidFill>
-                <a:latin typeface="Helvetica"/>
+                <a:latin typeface="Raleway"/>
               </a:rPr>
               <a:t>{{CAP_3_TITLE}}</a:t>
             </a:r>
@@ -4405,7 +4405,7 @@
                 <a:solidFill>
                   <a:srgbClr val="3E3E3E"/>
                 </a:solidFill>
-                <a:latin typeface="Helvetica"/>
+                <a:latin typeface="Raleway"/>
               </a:rPr>
               <a:t>{{CAP_3_BODY}}</a:t>
             </a:r>
@@ -4485,7 +4485,7 @@
                 <a:solidFill>
                   <a:srgbClr val="111110"/>
                 </a:solidFill>
-                <a:latin typeface="Helvetica"/>
+                <a:latin typeface="Raleway"/>
               </a:rPr>
               <a:t>{{CAP_4_TITLE}}</a:t>
             </a:r>
@@ -4520,7 +4520,7 @@
                 <a:solidFill>
                   <a:srgbClr val="3E3E3E"/>
                 </a:solidFill>
-                <a:latin typeface="Helvetica"/>
+                <a:latin typeface="Raleway"/>
               </a:rPr>
               <a:t>{{CAP_4_BODY}}</a:t>
             </a:r>
@@ -4600,7 +4600,7 @@
                 <a:solidFill>
                   <a:srgbClr val="111110"/>
                 </a:solidFill>
-                <a:latin typeface="Helvetica"/>
+                <a:latin typeface="Raleway"/>
               </a:rPr>
               <a:t>{{CAP_5_TITLE}}</a:t>
             </a:r>
@@ -4635,7 +4635,7 @@
                 <a:solidFill>
                   <a:srgbClr val="3E3E3E"/>
                 </a:solidFill>
-                <a:latin typeface="Helvetica"/>
+                <a:latin typeface="Raleway"/>
               </a:rPr>
               <a:t>{{CAP_5_BODY}}</a:t>
             </a:r>
@@ -4715,7 +4715,7 @@
                 <a:solidFill>
                   <a:srgbClr val="111110"/>
                 </a:solidFill>
-                <a:latin typeface="Helvetica"/>
+                <a:latin typeface="Raleway"/>
               </a:rPr>
               <a:t>{{CAP_6_TITLE}}</a:t>
             </a:r>
@@ -4750,7 +4750,7 @@
                 <a:solidFill>
                   <a:srgbClr val="3E3E3E"/>
                 </a:solidFill>
-                <a:latin typeface="Helvetica"/>
+                <a:latin typeface="Raleway"/>
               </a:rPr>
               <a:t>{{CAP_6_BODY}}</a:t>
             </a:r>
@@ -4828,7 +4828,7 @@
                 <a:solidFill>
                   <a:srgbClr val="FFFFFF"/>
                 </a:solidFill>
-                <a:latin typeface="Helvetica"/>
+                <a:latin typeface="Raleway"/>
               </a:rPr>
               <a:t>{{RESULT_1_PCT}}</a:t>
             </a:r>
@@ -4863,7 +4863,7 @@
                 <a:solidFill>
                   <a:srgbClr val="FFFFFF"/>
                 </a:solidFill>
-                <a:latin typeface="Helvetica"/>
+                <a:latin typeface="Raleway"/>
               </a:rPr>
               <a:t>{{RESULT_1_TEXT}}</a:t>
             </a:r>
@@ -4898,7 +4898,7 @@
                 <a:solidFill>
                   <a:srgbClr val="FFFFFF"/>
                 </a:solidFill>
-                <a:latin typeface="Helvetica"/>
+                <a:latin typeface="Raleway"/>
               </a:rPr>
               <a:t>{{RESULT_2_PCT}}</a:t>
             </a:r>
@@ -4933,7 +4933,7 @@
                 <a:solidFill>
                   <a:srgbClr val="FFFFFF"/>
                 </a:solidFill>
-                <a:latin typeface="Helvetica"/>
+                <a:latin typeface="Raleway"/>
               </a:rPr>
               <a:t>{{RESULT_2_TEXT}}</a:t>
             </a:r>
@@ -4968,7 +4968,7 @@
                 <a:solidFill>
                   <a:srgbClr val="FFFFFF"/>
                 </a:solidFill>
-                <a:latin typeface="Helvetica"/>
+                <a:latin typeface="Raleway"/>
               </a:rPr>
               <a:t>{{RESULT_3_PCT}}</a:t>
             </a:r>
@@ -5003,7 +5003,7 @@
                 <a:solidFill>
                   <a:srgbClr val="FFFFFF"/>
                 </a:solidFill>
-                <a:latin typeface="Helvetica"/>
+                <a:latin typeface="Raleway"/>
               </a:rPr>
               <a:t>{{RESULT_3_TEXT}}</a:t>
             </a:r>

--- a/data/templates/case_study_v2.pptx
+++ b/data/templates/case_study_v2.pptx
@@ -3517,13 +3517,13 @@
         <p:spPr>
           <a:xfrm>
             <a:off x="0" y="0"/>
-            <a:ext cx="5852160" cy="91440"/>
+            <a:ext cx="8129016" cy="75895"/>
           </a:xfrm>
           <a:prstGeom prst="rect">
             <a:avLst/>
           </a:prstGeom>
           <a:solidFill>
-            <a:srgbClr val="C02026"/>
+            <a:srgbClr val="D62839"/>
           </a:solidFill>
           <a:ln>
             <a:noFill/>
@@ -3559,14 +3559,14 @@
         </p:nvSpPr>
         <p:spPr>
           <a:xfrm>
-            <a:off x="5852160" y="0"/>
-            <a:ext cx="6336792" cy="91440"/>
+            <a:off x="8129016" y="0"/>
+            <a:ext cx="4059935" cy="75895"/>
           </a:xfrm>
           <a:prstGeom prst="rect">
             <a:avLst/>
           </a:prstGeom>
           <a:solidFill>
-            <a:srgbClr val="3A8B82"/>
+            <a:srgbClr val="2A9D8F"/>
           </a:solidFill>
           <a:ln>
             <a:noFill/>
@@ -3609,7 +3609,7 @@
             <a:avLst/>
           </a:prstGeom>
           <a:solidFill>
-            <a:srgbClr val="C02026"/>
+            <a:srgbClr val="D62839"/>
           </a:solidFill>
           <a:ln>
             <a:noFill/>
@@ -3663,7 +3663,7 @@
             <a:r>
               <a:rPr sz="2400" b="1">
                 <a:solidFill>
-                  <a:srgbClr val="C02026"/>
+                  <a:srgbClr val="D62839"/>
                 </a:solidFill>
                 <a:latin typeface="Oswald"/>
               </a:rPr>
@@ -3707,9 +3707,9 @@
             <a:r>
               <a:rPr sz="1500" b="1">
                 <a:solidFill>
-                  <a:srgbClr val="3A8B82"/>
+                  <a:srgbClr val="2A9D8F"/>
                 </a:solidFill>
-                <a:latin typeface="Oswald"/>
+                <a:latin typeface="Roboto Condensed"/>
               </a:rPr>
               <a:t>CLIENT: {{CLIENT}}  |  DOMAIN: {{DOMAIN}}</a:t>
             </a:r>
@@ -3731,7 +3731,7 @@
             <a:avLst/>
           </a:prstGeom>
           <a:solidFill>
-            <a:srgbClr val="C02026"/>
+            <a:srgbClr val="D62839"/>
           </a:solidFill>
           <a:ln>
             <a:noFill/>
@@ -3828,7 +3828,7 @@
           <a:p>
             <a:pPr algn="l"/>
             <a:r>
-              <a:rPr sz="1300" b="1">
+              <a:rPr sz="1400" b="1">
                 <a:solidFill>
                   <a:srgbClr val="111110"/>
                 </a:solidFill>
@@ -3863,7 +3863,7 @@
           <a:p>
             <a:pPr algn="l"/>
             <a:r>
-              <a:rPr sz="1100" b="0">
+              <a:rPr sz="1300" b="0">
                 <a:solidFill>
                   <a:srgbClr val="3E3E3E"/>
                 </a:solidFill>
@@ -3889,7 +3889,7 @@
             <a:avLst/>
           </a:prstGeom>
           <a:solidFill>
-            <a:srgbClr val="3A8B82"/>
+            <a:srgbClr val="2A9D8F"/>
           </a:solidFill>
           <a:ln>
             <a:noFill/>
@@ -3986,7 +3986,7 @@
           <a:p>
             <a:pPr algn="l"/>
             <a:r>
-              <a:rPr sz="1300" b="1">
+              <a:rPr sz="1400" b="1">
                 <a:solidFill>
                   <a:srgbClr val="111110"/>
                 </a:solidFill>
@@ -4021,7 +4021,7 @@
           <a:p>
             <a:pPr algn="l"/>
             <a:r>
-              <a:rPr sz="1100" b="0">
+              <a:rPr sz="1300" b="0">
                 <a:solidFill>
                   <a:srgbClr val="3E3E3E"/>
                 </a:solidFill>
@@ -4058,7 +4058,7 @@
             <a:r>
               <a:rPr sz="1400" b="0">
                 <a:solidFill>
-                  <a:srgbClr val="3A8B82"/>
+                  <a:srgbClr val="2A9D8F"/>
                 </a:solidFill>
                 <a:latin typeface="Raleway"/>
               </a:rPr>
@@ -4136,7 +4136,7 @@
           <a:p>
             <a:pPr algn="l"/>
             <a:r>
-              <a:rPr sz="1300" b="1">
+              <a:rPr sz="1400" b="1">
                 <a:solidFill>
                   <a:srgbClr val="111110"/>
                 </a:solidFill>
@@ -4171,7 +4171,7 @@
           <a:p>
             <a:pPr algn="l"/>
             <a:r>
-              <a:rPr sz="1100" b="0">
+              <a:rPr sz="1300" b="0">
                 <a:solidFill>
                   <a:srgbClr val="3E3E3E"/>
                 </a:solidFill>
@@ -4251,7 +4251,7 @@
           <a:p>
             <a:pPr algn="l"/>
             <a:r>
-              <a:rPr sz="1300" b="1">
+              <a:rPr sz="1400" b="1">
                 <a:solidFill>
                   <a:srgbClr val="111110"/>
                 </a:solidFill>
@@ -4286,7 +4286,7 @@
           <a:p>
             <a:pPr algn="l"/>
             <a:r>
-              <a:rPr sz="1100" b="0">
+              <a:rPr sz="1300" b="0">
                 <a:solidFill>
                   <a:srgbClr val="3E3E3E"/>
                 </a:solidFill>
@@ -4366,7 +4366,7 @@
           <a:p>
             <a:pPr algn="l"/>
             <a:r>
-              <a:rPr sz="1300" b="1">
+              <a:rPr sz="1400" b="1">
                 <a:solidFill>
                   <a:srgbClr val="111110"/>
                 </a:solidFill>
@@ -4401,7 +4401,7 @@
           <a:p>
             <a:pPr algn="l"/>
             <a:r>
-              <a:rPr sz="1100" b="0">
+              <a:rPr sz="1300" b="0">
                 <a:solidFill>
                   <a:srgbClr val="3E3E3E"/>
                 </a:solidFill>
@@ -4481,7 +4481,7 @@
           <a:p>
             <a:pPr algn="l"/>
             <a:r>
-              <a:rPr sz="1300" b="1">
+              <a:rPr sz="1400" b="1">
                 <a:solidFill>
                   <a:srgbClr val="111110"/>
                 </a:solidFill>
@@ -4516,7 +4516,7 @@
           <a:p>
             <a:pPr algn="l"/>
             <a:r>
-              <a:rPr sz="1100" b="0">
+              <a:rPr sz="1300" b="0">
                 <a:solidFill>
                   <a:srgbClr val="3E3E3E"/>
                 </a:solidFill>
@@ -4596,7 +4596,7 @@
           <a:p>
             <a:pPr algn="l"/>
             <a:r>
-              <a:rPr sz="1300" b="1">
+              <a:rPr sz="1400" b="1">
                 <a:solidFill>
                   <a:srgbClr val="111110"/>
                 </a:solidFill>
@@ -4631,7 +4631,7 @@
           <a:p>
             <a:pPr algn="l"/>
             <a:r>
-              <a:rPr sz="1100" b="0">
+              <a:rPr sz="1300" b="0">
                 <a:solidFill>
                   <a:srgbClr val="3E3E3E"/>
                 </a:solidFill>
@@ -4711,7 +4711,7 @@
           <a:p>
             <a:pPr algn="l"/>
             <a:r>
-              <a:rPr sz="1300" b="1">
+              <a:rPr sz="1400" b="1">
                 <a:solidFill>
                   <a:srgbClr val="111110"/>
                 </a:solidFill>
@@ -4746,7 +4746,7 @@
           <a:p>
             <a:pPr algn="l"/>
             <a:r>
-              <a:rPr sz="1100" b="0">
+              <a:rPr sz="1300" b="0">
                 <a:solidFill>
                   <a:srgbClr val="3E3E3E"/>
                 </a:solidFill>
@@ -4772,7 +4772,7 @@
             <a:avLst/>
           </a:prstGeom>
           <a:solidFill>
-            <a:srgbClr val="3A8B82"/>
+            <a:srgbClr val="2A9D8F"/>
           </a:solidFill>
           <a:ln>
             <a:noFill/>
@@ -4859,7 +4859,7 @@
           <a:p>
             <a:pPr algn="ctr"/>
             <a:r>
-              <a:rPr sz="1200" b="0">
+              <a:rPr sz="1300" b="0">
                 <a:solidFill>
                   <a:srgbClr val="FFFFFF"/>
                 </a:solidFill>
@@ -4929,7 +4929,7 @@
           <a:p>
             <a:pPr algn="ctr"/>
             <a:r>
-              <a:rPr sz="1200" b="0">
+              <a:rPr sz="1300" b="0">
                 <a:solidFill>
                   <a:srgbClr val="FFFFFF"/>
                 </a:solidFill>
@@ -4999,7 +4999,7 @@
           <a:p>
             <a:pPr algn="ctr"/>
             <a:r>
-              <a:rPr sz="1200" b="0">
+              <a:rPr sz="1300" b="0">
                 <a:solidFill>
                   <a:srgbClr val="FFFFFF"/>
                 </a:solidFill>

--- a/data/templates/case_study_v2.pptx
+++ b/data/templates/case_study_v2.pptx
@@ -3828,7 +3828,7 @@
           <a:p>
             <a:pPr algn="l"/>
             <a:r>
-              <a:rPr sz="1400" b="1">
+              <a:rPr sz="1300" b="1">
                 <a:solidFill>
                   <a:srgbClr val="111110"/>
                 </a:solidFill>
@@ -3863,7 +3863,7 @@
           <a:p>
             <a:pPr algn="l"/>
             <a:r>
-              <a:rPr sz="1300" b="0">
+              <a:rPr sz="1100" b="0">
                 <a:solidFill>
                   <a:srgbClr val="3E3E3E"/>
                 </a:solidFill>
@@ -3986,7 +3986,7 @@
           <a:p>
             <a:pPr algn="l"/>
             <a:r>
-              <a:rPr sz="1400" b="1">
+              <a:rPr sz="1300" b="1">
                 <a:solidFill>
                   <a:srgbClr val="111110"/>
                 </a:solidFill>
@@ -4021,7 +4021,7 @@
           <a:p>
             <a:pPr algn="l"/>
             <a:r>
-              <a:rPr sz="1300" b="0">
+              <a:rPr sz="1100" b="0">
                 <a:solidFill>
                   <a:srgbClr val="3E3E3E"/>
                 </a:solidFill>
@@ -4136,7 +4136,7 @@
           <a:p>
             <a:pPr algn="l"/>
             <a:r>
-              <a:rPr sz="1400" b="1">
+              <a:rPr sz="1300" b="1">
                 <a:solidFill>
                   <a:srgbClr val="111110"/>
                 </a:solidFill>
@@ -4171,7 +4171,7 @@
           <a:p>
             <a:pPr algn="l"/>
             <a:r>
-              <a:rPr sz="1300" b="0">
+              <a:rPr sz="1100" b="0">
                 <a:solidFill>
                   <a:srgbClr val="3E3E3E"/>
                 </a:solidFill>
@@ -4251,7 +4251,7 @@
           <a:p>
             <a:pPr algn="l"/>
             <a:r>
-              <a:rPr sz="1400" b="1">
+              <a:rPr sz="1300" b="1">
                 <a:solidFill>
                   <a:srgbClr val="111110"/>
                 </a:solidFill>
@@ -4286,7 +4286,7 @@
           <a:p>
             <a:pPr algn="l"/>
             <a:r>
-              <a:rPr sz="1300" b="0">
+              <a:rPr sz="1100" b="0">
                 <a:solidFill>
                   <a:srgbClr val="3E3E3E"/>
                 </a:solidFill>
@@ -4366,7 +4366,7 @@
           <a:p>
             <a:pPr algn="l"/>
             <a:r>
-              <a:rPr sz="1400" b="1">
+              <a:rPr sz="1300" b="1">
                 <a:solidFill>
                   <a:srgbClr val="111110"/>
                 </a:solidFill>
@@ -4401,7 +4401,7 @@
           <a:p>
             <a:pPr algn="l"/>
             <a:r>
-              <a:rPr sz="1300" b="0">
+              <a:rPr sz="1100" b="0">
                 <a:solidFill>
                   <a:srgbClr val="3E3E3E"/>
                 </a:solidFill>
@@ -4481,7 +4481,7 @@
           <a:p>
             <a:pPr algn="l"/>
             <a:r>
-              <a:rPr sz="1400" b="1">
+              <a:rPr sz="1300" b="1">
                 <a:solidFill>
                   <a:srgbClr val="111110"/>
                 </a:solidFill>
@@ -4516,7 +4516,7 @@
           <a:p>
             <a:pPr algn="l"/>
             <a:r>
-              <a:rPr sz="1300" b="0">
+              <a:rPr sz="1100" b="0">
                 <a:solidFill>
                   <a:srgbClr val="3E3E3E"/>
                 </a:solidFill>
@@ -4596,7 +4596,7 @@
           <a:p>
             <a:pPr algn="l"/>
             <a:r>
-              <a:rPr sz="1400" b="1">
+              <a:rPr sz="1300" b="1">
                 <a:solidFill>
                   <a:srgbClr val="111110"/>
                 </a:solidFill>
@@ -4631,7 +4631,7 @@
           <a:p>
             <a:pPr algn="l"/>
             <a:r>
-              <a:rPr sz="1300" b="0">
+              <a:rPr sz="1100" b="0">
                 <a:solidFill>
                   <a:srgbClr val="3E3E3E"/>
                 </a:solidFill>
@@ -4711,7 +4711,7 @@
           <a:p>
             <a:pPr algn="l"/>
             <a:r>
-              <a:rPr sz="1400" b="1">
+              <a:rPr sz="1300" b="1">
                 <a:solidFill>
                   <a:srgbClr val="111110"/>
                 </a:solidFill>
@@ -4746,7 +4746,7 @@
           <a:p>
             <a:pPr algn="l"/>
             <a:r>
-              <a:rPr sz="1300" b="0">
+              <a:rPr sz="1100" b="0">
                 <a:solidFill>
                   <a:srgbClr val="3E3E3E"/>
                 </a:solidFill>
